--- a/videos/machine-learning/03_ridger_regression_gradient_descent/recreated_pptx/slide_004_recreated.pptx
+++ b/videos/machine-learning/03_ridger_regression_gradient_descent/recreated_pptx/slide_004_recreated.pptx
@@ -1131,7 +1131,7 @@
       </p:sp>
       <p:pic>
         <p:nvPicPr>
-          <p:cNvPr id="10" name="Image 0" descr="/workspaces/codespaces-blank/ai_llm_slides/videos/machine-learning/03_ridger_regression_gradient_descent/recreated_pptx/build/assets/eq_004_Yvec.png">    </p:cNvPr>
+          <p:cNvPr id="10" name="Image 0" descr="/home/ahmed/Projects/ai_llm_slides/videos/machine-learning/03_ridger_regression_gradient_descent/recreated_pptx/build/assets/eq_004_Yvec.png">    </p:cNvPr>
           <p:cNvPicPr>
             <a:picLocks noChangeAspect="1"/>
           </p:cNvPicPr>
@@ -1145,8 +1145,8 @@
         </p:blipFill>
         <p:spPr>
           <a:xfrm>
-            <a:off x="1104900" y="1663700"/>
-            <a:ext cx="1740771" cy="652882"/>
+            <a:off x="1066800" y="1295400"/>
+            <a:ext cx="2260598" cy="1371600"/>
           </a:xfrm>
           <a:prstGeom prst="rect">
             <a:avLst/>
@@ -1264,7 +1264,7 @@
       </p:sp>
       <p:pic>
         <p:nvPicPr>
-          <p:cNvPr id="14" name="Image 1" descr="/workspaces/codespaces-blank/ai_llm_slides/videos/machine-learning/03_ridger_regression_gradient_descent/recreated_pptx/build/assets/eq_004_Yhatvec.png">    </p:cNvPr>
+          <p:cNvPr id="14" name="Image 1" descr="/home/ahmed/Projects/ai_llm_slides/videos/machine-learning/03_ridger_regression_gradient_descent/recreated_pptx/build/assets/eq_004_Yhatvec.png">    </p:cNvPr>
           <p:cNvPicPr>
             <a:picLocks noChangeAspect="1"/>
           </p:cNvPicPr>
@@ -1278,8 +1278,8 @@
         </p:blipFill>
         <p:spPr>
           <a:xfrm>
-            <a:off x="5486400" y="1651000"/>
-            <a:ext cx="1634947" cy="791870"/>
+            <a:off x="5435600" y="1320800"/>
+            <a:ext cx="1752603" cy="1460498"/>
           </a:xfrm>
           <a:prstGeom prst="rect">
             <a:avLst/>
@@ -1452,7 +1452,7 @@
               <a:buNone/>
             </a:pPr>
             <a:r>
-              <a:rPr lang="en-US" sz="1100" b="1" dirty="0">
+              <a:rPr lang="en-US" sz="1100" b="1" u="sng" dirty="0">
                 <a:solidFill>
                   <a:srgbClr val="FF0000"/>
                 </a:solidFill>
@@ -1468,7 +1468,7 @@
       </p:sp>
       <p:pic>
         <p:nvPicPr>
-          <p:cNvPr id="19" name="Image 2" descr="/workspaces/codespaces-blank/ai_llm_slides/videos/machine-learning/03_ridger_regression_gradient_descent/recreated_pptx/build/assets/eq_004_norm.png">    </p:cNvPr>
+          <p:cNvPr id="19" name="Image 2" descr="/home/ahmed/Projects/ai_llm_slides/videos/machine-learning/03_ridger_regression_gradient_descent/recreated_pptx/build/assets/eq_004_norm.png">    </p:cNvPr>
           <p:cNvPicPr>
             <a:picLocks noChangeAspect="1"/>
           </p:cNvPicPr>
@@ -1700,8 +1700,8 @@
         </p:nvSpPr>
         <p:spPr>
           <a:xfrm>
-            <a:off x="6273800" y="2946400"/>
-            <a:ext cx="4953000" cy="1765300"/>
+            <a:off x="6273800" y="2971800"/>
+            <a:ext cx="4927600" cy="1739900"/>
           </a:xfrm>
           <a:prstGeom prst="rect">
             <a:avLst/>
@@ -1725,8 +1725,8 @@
         </p:nvSpPr>
         <p:spPr>
           <a:xfrm>
-            <a:off x="6350000" y="3149600"/>
-            <a:ext cx="4800600" cy="279400"/>
+            <a:off x="6413500" y="3200400"/>
+            <a:ext cx="1524000" cy="279400"/>
           </a:xfrm>
           <a:prstGeom prst="rect">
             <a:avLst/>
@@ -1745,7 +1745,7 @@
               <a:buNone/>
             </a:pPr>
             <a:r>
-              <a:rPr lang="en-US" sz="1600" i="1" u="sng" dirty="0">
+              <a:rPr lang="en-US" sz="1600" b="1" dirty="0">
                 <a:solidFill>
                   <a:srgbClr val="333333"/>
                 </a:solidFill>
@@ -1762,7 +1762,7 @@
               <a:buNone/>
             </a:pPr>
             <a:r>
-              <a:rPr lang="en-US" sz="1600" i="1" dirty="0">
+              <a:rPr lang="en-US" sz="1600" dirty="0">
                 <a:solidFill>
                   <a:srgbClr val="333333"/>
                 </a:solidFill>
@@ -1770,7 +1770,7 @@
                 <a:ea typeface="Arial" pitchFamily="34" charset="-122"/>
                 <a:cs typeface="Arial" pitchFamily="34" charset="-120"/>
               </a:rPr>
-              <a:t> = X</a:t>
+              <a:t> = </a:t>
             </a:r>
             <a:pPr algn="l" indent="0" marL="0">
               <a:lnSpc>
@@ -1779,15 +1779,15 @@
               <a:buNone/>
             </a:pPr>
             <a:r>
-              <a:rPr lang="en-US" sz="1600" i="1" u="sng" dirty="0">
-                <a:solidFill>
-                  <a:srgbClr val="333333"/>
-                </a:solidFill>
-                <a:latin typeface="Arial" pitchFamily="34" charset="0"/>
-                <a:ea typeface="Arial" pitchFamily="34" charset="-122"/>
-                <a:cs typeface="Arial" pitchFamily="34" charset="-120"/>
-              </a:rPr>
-              <a:t>W</a:t>
+              <a:rPr lang="en-US" sz="1600" b="1" i="1" dirty="0">
+                <a:solidFill>
+                  <a:srgbClr val="1F1FC8"/>
+                </a:solidFill>
+                <a:latin typeface="Arial" pitchFamily="34" charset="0"/>
+                <a:ea typeface="Arial" pitchFamily="34" charset="-122"/>
+                <a:cs typeface="Arial" pitchFamily="34" charset="-120"/>
+              </a:rPr>
+              <a:t>X</a:t>
             </a:r>
             <a:pPr algn="l" indent="0" marL="0">
               <a:lnSpc>
@@ -1796,7 +1796,7 @@
               <a:buNone/>
             </a:pPr>
             <a:r>
-              <a:rPr lang="en-US" sz="1400" b="1" dirty="0">
+              <a:rPr lang="en-US" sz="1600" b="1" i="1" dirty="0">
                 <a:solidFill>
                   <a:srgbClr val="FF0000"/>
                 </a:solidFill>
@@ -1804,7 +1804,7 @@
                 <a:ea typeface="Arial" pitchFamily="34" charset="-122"/>
                 <a:cs typeface="Arial" pitchFamily="34" charset="-120"/>
               </a:rPr>
-              <a:t>  Predicted</a:t>
+              <a:t> W</a:t>
             </a:r>
             <a:endParaRPr lang="en-US" sz="1600" dirty="0"/>
           </a:p>
@@ -1812,14 +1812,60 @@
       </p:sp>
       <p:sp>
         <p:nvSpPr>
-          <p:cNvPr id="26" name="Text 21"/>
-          <p:cNvSpPr/>
-          <p:nvPr/>
-        </p:nvSpPr>
-        <p:spPr>
-          <a:xfrm>
-            <a:off x="6350000" y="3619500"/>
-            <a:ext cx="4800600" cy="279400"/>
+          <p:cNvPr id="26" name="Shape 21"/>
+          <p:cNvSpPr/>
+          <p:nvPr/>
+        </p:nvSpPr>
+        <p:spPr>
+          <a:xfrm>
+            <a:off x="6451600" y="3378200"/>
+            <a:ext cx="228600" cy="0"/>
+          </a:xfrm>
+          <a:prstGeom prst="line">
+            <a:avLst/>
+          </a:prstGeom>
+          <a:noFill/>
+          <a:ln w="19050">
+            <a:solidFill>
+              <a:srgbClr val="000000"/>
+            </a:solidFill>
+            <a:prstDash val="solid"/>
+          </a:ln>
+        </p:spPr>
+      </p:sp>
+      <p:sp>
+        <p:nvSpPr>
+          <p:cNvPr id="27" name="Shape 22"/>
+          <p:cNvSpPr/>
+          <p:nvPr/>
+        </p:nvSpPr>
+        <p:spPr>
+          <a:xfrm>
+            <a:off x="6997700" y="3378200"/>
+            <a:ext cx="190500" cy="0"/>
+          </a:xfrm>
+          <a:prstGeom prst="line">
+            <a:avLst/>
+          </a:prstGeom>
+          <a:noFill/>
+          <a:ln w="19050">
+            <a:solidFill>
+              <a:srgbClr val="FF0000"/>
+            </a:solidFill>
+            <a:prstDash val="solid"/>
+          </a:ln>
+        </p:spPr>
+      </p:sp>
+      <p:sp>
+        <p:nvSpPr>
+          <p:cNvPr id="28" name="Text 23"/>
+          <p:cNvSpPr/>
+          <p:nvPr/>
+        </p:nvSpPr>
+        <p:spPr>
+          <a:xfrm>
+            <a:off x="8540750" y="3251200"/>
+            <a:ext cx="1117600" cy="279400"/>
           </a:xfrm>
           <a:prstGeom prst="rect">
             <a:avLst/>
@@ -1833,52 +1879,35 @@
           <a:p>
             <a:pPr algn="l" indent="0" marL="0">
               <a:lnSpc>
-                <a:spcPts val="1300"/>
-              </a:lnSpc>
-              <a:buNone/>
-            </a:pPr>
-            <a:r>
-              <a:rPr lang="en-US" sz="1300" b="1" dirty="0">
-                <a:solidFill>
-                  <a:srgbClr val="333333"/>
-                </a:solidFill>
-                <a:latin typeface="Arial" pitchFamily="34" charset="0"/>
-                <a:ea typeface="Arial" pitchFamily="34" charset="-122"/>
-                <a:cs typeface="Arial" pitchFamily="34" charset="-120"/>
-              </a:rPr>
-              <a:t>Where: </a:t>
-            </a:r>
-            <a:pPr algn="l" indent="0" marL="0">
-              <a:lnSpc>
-                <a:spcPts val="1300"/>
-              </a:lnSpc>
-              <a:buNone/>
-            </a:pPr>
-            <a:r>
-              <a:rPr lang="en-US" sz="1300" dirty="0">
-                <a:solidFill>
-                  <a:srgbClr val="333333"/>
-                </a:solidFill>
-                <a:latin typeface="Arial" pitchFamily="34" charset="0"/>
-                <a:ea typeface="Arial" pitchFamily="34" charset="-122"/>
-                <a:cs typeface="Arial" pitchFamily="34" charset="-120"/>
-              </a:rPr>
-              <a:t>X_{N×(d+1)} is a matrix ⇒ Given</a:t>
-            </a:r>
-            <a:endParaRPr lang="en-US" sz="1300" dirty="0"/>
+                <a:spcPts val="1400"/>
+              </a:lnSpc>
+              <a:buNone/>
+            </a:pPr>
+            <a:r>
+              <a:rPr lang="en-US" sz="1400" b="1" i="1" dirty="0">
+                <a:solidFill>
+                  <a:srgbClr val="FF0000"/>
+                </a:solidFill>
+                <a:latin typeface="Arial" pitchFamily="34" charset="0"/>
+                <a:ea typeface="Arial" pitchFamily="34" charset="-122"/>
+                <a:cs typeface="Arial" pitchFamily="34" charset="-120"/>
+              </a:rPr>
+              <a:t>Predicted</a:t>
+            </a:r>
+            <a:endParaRPr lang="en-US" sz="1400" dirty="0"/>
           </a:p>
         </p:txBody>
       </p:sp>
       <p:sp>
         <p:nvSpPr>
-          <p:cNvPr id="27" name="Text 22"/>
-          <p:cNvSpPr/>
-          <p:nvPr/>
-        </p:nvSpPr>
-        <p:spPr>
-          <a:xfrm>
-            <a:off x="6350000" y="4000500"/>
-            <a:ext cx="4800600" cy="279400"/>
+          <p:cNvPr id="29" name="Text 24"/>
+          <p:cNvSpPr/>
+          <p:nvPr/>
+        </p:nvSpPr>
+        <p:spPr>
+          <a:xfrm>
+            <a:off x="6426200" y="3606800"/>
+            <a:ext cx="2794000" cy="279400"/>
           </a:xfrm>
           <a:prstGeom prst="rect">
             <a:avLst/>
@@ -1897,6 +1926,23 @@
               <a:buNone/>
             </a:pPr>
             <a:r>
+              <a:rPr lang="en-US" sz="1300" i="1" dirty="0">
+                <a:solidFill>
+                  <a:srgbClr val="333333"/>
+                </a:solidFill>
+                <a:latin typeface="Arial" pitchFamily="34" charset="0"/>
+                <a:ea typeface="Arial" pitchFamily="34" charset="-122"/>
+                <a:cs typeface="Arial" pitchFamily="34" charset="-120"/>
+              </a:rPr>
+              <a:t>Where</a:t>
+            </a:r>
+            <a:pPr algn="l" indent="0" marL="0">
+              <a:lnSpc>
+                <a:spcPts val="1300"/>
+              </a:lnSpc>
+              <a:buNone/>
+            </a:pPr>
+            <a:r>
               <a:rPr lang="en-US" sz="1300" dirty="0">
                 <a:solidFill>
                   <a:srgbClr val="333333"/>
@@ -1905,7 +1951,75 @@
                 <a:ea typeface="Arial" pitchFamily="34" charset="-122"/>
                 <a:cs typeface="Arial" pitchFamily="34" charset="-120"/>
               </a:rPr>
-              <a:t>Y_{N×1} is labels vector ⇒ Given</a:t>
+              <a:t> : </a:t>
+            </a:r>
+            <a:pPr algn="l" indent="0" marL="0">
+              <a:lnSpc>
+                <a:spcPts val="1300"/>
+              </a:lnSpc>
+              <a:buNone/>
+            </a:pPr>
+            <a:r>
+              <a:rPr lang="en-US" sz="1300" b="1" i="1" dirty="0">
+                <a:solidFill>
+                  <a:srgbClr val="1F1FC8"/>
+                </a:solidFill>
+                <a:latin typeface="Arial" pitchFamily="34" charset="0"/>
+                <a:ea typeface="Arial" pitchFamily="34" charset="-122"/>
+                <a:cs typeface="Arial" pitchFamily="34" charset="-120"/>
+              </a:rPr>
+              <a:t>X</a:t>
+            </a:r>
+            <a:pPr algn="l" indent="0" marL="0">
+              <a:lnSpc>
+                <a:spcPts val="1300"/>
+              </a:lnSpc>
+              <a:buNone/>
+            </a:pPr>
+            <a:r>
+              <a:rPr lang="en-US" sz="950" i="1" baseline="-40000" dirty="0">
+                <a:solidFill>
+                  <a:srgbClr val="1F1FC8"/>
+                </a:solidFill>
+                <a:latin typeface="Arial" pitchFamily="34" charset="0"/>
+                <a:ea typeface="Arial" pitchFamily="34" charset="-122"/>
+                <a:cs typeface="Arial" pitchFamily="34" charset="-120"/>
+              </a:rPr>
+              <a:t>N x d+1</a:t>
+            </a:r>
+            <a:pPr algn="l" indent="0" marL="0">
+              <a:lnSpc>
+                <a:spcPts val="1300"/>
+              </a:lnSpc>
+              <a:buNone/>
+            </a:pPr>
+            <a:r>
+              <a:rPr lang="en-US" sz="1300" dirty="0">
+                <a:solidFill>
+                  <a:srgbClr val="333333"/>
+                </a:solidFill>
+                <a:latin typeface="Arial" pitchFamily="34" charset="0"/>
+                <a:ea typeface="Arial" pitchFamily="34" charset="-122"/>
+                <a:cs typeface="Arial" pitchFamily="34" charset="-120"/>
+              </a:rPr>
+              <a:t> is a </a:t>
+            </a:r>
+            <a:pPr algn="l" indent="0" marL="0">
+              <a:lnSpc>
+                <a:spcPts val="1300"/>
+              </a:lnSpc>
+              <a:buNone/>
+            </a:pPr>
+            <a:r>
+              <a:rPr lang="en-US" sz="1300" b="1" dirty="0">
+                <a:solidFill>
+                  <a:srgbClr val="333333"/>
+                </a:solidFill>
+                <a:latin typeface="Arial" pitchFamily="34" charset="0"/>
+                <a:ea typeface="Arial" pitchFamily="34" charset="-122"/>
+                <a:cs typeface="Arial" pitchFamily="34" charset="-120"/>
+              </a:rPr>
+              <a:t>matrix</a:t>
             </a:r>
             <a:endParaRPr lang="en-US" sz="1300" dirty="0"/>
           </a:p>
@@ -1913,14 +2027,56 @@
       </p:sp>
       <p:sp>
         <p:nvSpPr>
-          <p:cNvPr id="28" name="Text 23"/>
-          <p:cNvSpPr/>
-          <p:nvPr/>
-        </p:nvSpPr>
-        <p:spPr>
-          <a:xfrm>
-            <a:off x="6350000" y="4381500"/>
-            <a:ext cx="4800600" cy="279400"/>
+          <p:cNvPr id="30" name="Text 25"/>
+          <p:cNvSpPr/>
+          <p:nvPr/>
+        </p:nvSpPr>
+        <p:spPr>
+          <a:xfrm>
+            <a:off x="9779000" y="3632200"/>
+            <a:ext cx="279400" cy="203200"/>
+          </a:xfrm>
+          <a:prstGeom prst="rect">
+            <a:avLst/>
+          </a:prstGeom>
+          <a:noFill/>
+          <a:ln/>
+        </p:spPr>
+        <p:txBody>
+          <a:bodyPr wrap="square" lIns="0" tIns="0" rIns="0" bIns="0" rtlCol="0" anchor="ctr"/>
+          <a:lstStyle/>
+          <a:p>
+            <a:pPr algn="ctr" indent="0" marL="0">
+              <a:lnSpc>
+                <a:spcPts val="1300"/>
+              </a:lnSpc>
+              <a:buNone/>
+            </a:pPr>
+            <a:r>
+              <a:rPr lang="en-US" sz="1300" b="1" dirty="0">
+                <a:solidFill>
+                  <a:srgbClr val="333333"/>
+                </a:solidFill>
+                <a:latin typeface="Arial" pitchFamily="34" charset="0"/>
+                <a:ea typeface="Arial" pitchFamily="34" charset="-122"/>
+                <a:cs typeface="Arial" pitchFamily="34" charset="-120"/>
+              </a:rPr>
+              <a:t>⇒</a:t>
+            </a:r>
+            <a:endParaRPr lang="en-US" sz="1300" dirty="0"/>
+          </a:p>
+        </p:txBody>
+      </p:sp>
+      <p:sp>
+        <p:nvSpPr>
+          <p:cNvPr id="31" name="Text 26"/>
+          <p:cNvSpPr/>
+          <p:nvPr/>
+        </p:nvSpPr>
+        <p:spPr>
+          <a:xfrm>
+            <a:off x="10147300" y="3606800"/>
+            <a:ext cx="1016000" cy="279400"/>
           </a:xfrm>
           <a:prstGeom prst="rect">
             <a:avLst/>
@@ -1939,6 +2095,82 @@
               <a:buNone/>
             </a:pPr>
             <a:r>
+              <a:rPr lang="en-US" sz="1300" b="1" dirty="0">
+                <a:solidFill>
+                  <a:srgbClr val="333333"/>
+                </a:solidFill>
+                <a:latin typeface="Arial" pitchFamily="34" charset="0"/>
+                <a:ea typeface="Arial" pitchFamily="34" charset="-122"/>
+                <a:cs typeface="Arial" pitchFamily="34" charset="-120"/>
+              </a:rPr>
+              <a:t>Given</a:t>
+            </a:r>
+            <a:endParaRPr lang="en-US" sz="1300" dirty="0"/>
+          </a:p>
+        </p:txBody>
+      </p:sp>
+      <p:sp>
+        <p:nvSpPr>
+          <p:cNvPr id="32" name="Text 27"/>
+          <p:cNvSpPr/>
+          <p:nvPr/>
+        </p:nvSpPr>
+        <p:spPr>
+          <a:xfrm>
+            <a:off x="7270750" y="3924300"/>
+            <a:ext cx="2794000" cy="279400"/>
+          </a:xfrm>
+          <a:prstGeom prst="rect">
+            <a:avLst/>
+          </a:prstGeom>
+          <a:noFill/>
+          <a:ln/>
+        </p:spPr>
+        <p:txBody>
+          <a:bodyPr wrap="square" lIns="0" tIns="0" rIns="0" bIns="0" rtlCol="0" anchor="t"/>
+          <a:lstStyle/>
+          <a:p>
+            <a:pPr algn="l" indent="0" marL="0">
+              <a:lnSpc>
+                <a:spcPts val="1300"/>
+              </a:lnSpc>
+              <a:buNone/>
+            </a:pPr>
+            <a:r>
+              <a:rPr lang="en-US" sz="1300" b="1" i="1" dirty="0">
+                <a:solidFill>
+                  <a:srgbClr val="FF0000"/>
+                </a:solidFill>
+                <a:latin typeface="Arial" pitchFamily="34" charset="0"/>
+                <a:ea typeface="Arial" pitchFamily="34" charset="-122"/>
+                <a:cs typeface="Arial" pitchFamily="34" charset="-120"/>
+              </a:rPr>
+              <a:t>Y</a:t>
+            </a:r>
+            <a:pPr algn="l" indent="0" marL="0">
+              <a:lnSpc>
+                <a:spcPts val="1300"/>
+              </a:lnSpc>
+              <a:buNone/>
+            </a:pPr>
+            <a:r>
+              <a:rPr lang="en-US" sz="950" i="1" baseline="-40000" dirty="0">
+                <a:solidFill>
+                  <a:srgbClr val="FF0000"/>
+                </a:solidFill>
+                <a:latin typeface="Arial" pitchFamily="34" charset="0"/>
+                <a:ea typeface="Arial" pitchFamily="34" charset="-122"/>
+                <a:cs typeface="Arial" pitchFamily="34" charset="-120"/>
+              </a:rPr>
+              <a:t>N x 1</a:t>
+            </a:r>
+            <a:pPr algn="l" indent="0" marL="0">
+              <a:lnSpc>
+                <a:spcPts val="1300"/>
+              </a:lnSpc>
+              <a:buNone/>
+            </a:pPr>
+            <a:r>
               <a:rPr lang="en-US" sz="1300" dirty="0">
                 <a:solidFill>
                   <a:srgbClr val="333333"/>
@@ -1947,7 +2179,24 @@
                 <a:ea typeface="Arial" pitchFamily="34" charset="-122"/>
                 <a:cs typeface="Arial" pitchFamily="34" charset="-120"/>
               </a:rPr>
-              <a:t>W is Model Parameter ⇒ Required</a:t>
+              <a:t> is labels </a:t>
+            </a:r>
+            <a:pPr algn="l" indent="0" marL="0">
+              <a:lnSpc>
+                <a:spcPts val="1300"/>
+              </a:lnSpc>
+              <a:buNone/>
+            </a:pPr>
+            <a:r>
+              <a:rPr lang="en-US" sz="1300" b="1" dirty="0">
+                <a:solidFill>
+                  <a:srgbClr val="333333"/>
+                </a:solidFill>
+                <a:latin typeface="Arial" pitchFamily="34" charset="0"/>
+                <a:ea typeface="Arial" pitchFamily="34" charset="-122"/>
+                <a:cs typeface="Arial" pitchFamily="34" charset="-120"/>
+              </a:rPr>
+              <a:t>vector</a:t>
             </a:r>
             <a:endParaRPr lang="en-US" sz="1300" dirty="0"/>
           </a:p>
@@ -1955,7 +2204,280 @@
       </p:sp>
       <p:sp>
         <p:nvSpPr>
-          <p:cNvPr id="29" name="Shape 24"/>
+          <p:cNvPr id="33" name="Shape 28"/>
+          <p:cNvSpPr/>
+          <p:nvPr/>
+        </p:nvSpPr>
+        <p:spPr>
+          <a:xfrm>
+            <a:off x="7289800" y="4095750"/>
+            <a:ext cx="215900" cy="0"/>
+          </a:xfrm>
+          <a:prstGeom prst="line">
+            <a:avLst/>
+          </a:prstGeom>
+          <a:noFill/>
+          <a:ln w="19050">
+            <a:solidFill>
+              <a:srgbClr val="FF0000"/>
+            </a:solidFill>
+            <a:prstDash val="solid"/>
+          </a:ln>
+        </p:spPr>
+      </p:sp>
+      <p:sp>
+        <p:nvSpPr>
+          <p:cNvPr id="34" name="Text 29"/>
+          <p:cNvSpPr/>
+          <p:nvPr/>
+        </p:nvSpPr>
+        <p:spPr>
+          <a:xfrm>
+            <a:off x="9779000" y="3949700"/>
+            <a:ext cx="279400" cy="203200"/>
+          </a:xfrm>
+          <a:prstGeom prst="rect">
+            <a:avLst/>
+          </a:prstGeom>
+          <a:noFill/>
+          <a:ln/>
+        </p:spPr>
+        <p:txBody>
+          <a:bodyPr wrap="square" lIns="0" tIns="0" rIns="0" bIns="0" rtlCol="0" anchor="ctr"/>
+          <a:lstStyle/>
+          <a:p>
+            <a:pPr algn="ctr" indent="0" marL="0">
+              <a:lnSpc>
+                <a:spcPts val="1300"/>
+              </a:lnSpc>
+              <a:buNone/>
+            </a:pPr>
+            <a:r>
+              <a:rPr lang="en-US" sz="1300" b="1" dirty="0">
+                <a:solidFill>
+                  <a:srgbClr val="333333"/>
+                </a:solidFill>
+                <a:latin typeface="Arial" pitchFamily="34" charset="0"/>
+                <a:ea typeface="Arial" pitchFamily="34" charset="-122"/>
+                <a:cs typeface="Arial" pitchFamily="34" charset="-120"/>
+              </a:rPr>
+              <a:t>⇒</a:t>
+            </a:r>
+            <a:endParaRPr lang="en-US" sz="1300" dirty="0"/>
+          </a:p>
+        </p:txBody>
+      </p:sp>
+      <p:sp>
+        <p:nvSpPr>
+          <p:cNvPr id="35" name="Text 30"/>
+          <p:cNvSpPr/>
+          <p:nvPr/>
+        </p:nvSpPr>
+        <p:spPr>
+          <a:xfrm>
+            <a:off x="10147300" y="3924300"/>
+            <a:ext cx="1016000" cy="279400"/>
+          </a:xfrm>
+          <a:prstGeom prst="rect">
+            <a:avLst/>
+          </a:prstGeom>
+          <a:noFill/>
+          <a:ln/>
+        </p:spPr>
+        <p:txBody>
+          <a:bodyPr wrap="square" lIns="0" tIns="0" rIns="0" bIns="0" rtlCol="0" anchor="t"/>
+          <a:lstStyle/>
+          <a:p>
+            <a:pPr algn="l" indent="0" marL="0">
+              <a:lnSpc>
+                <a:spcPts val="1300"/>
+              </a:lnSpc>
+              <a:buNone/>
+            </a:pPr>
+            <a:r>
+              <a:rPr lang="en-US" sz="1300" b="1" dirty="0">
+                <a:solidFill>
+                  <a:srgbClr val="333333"/>
+                </a:solidFill>
+                <a:latin typeface="Arial" pitchFamily="34" charset="0"/>
+                <a:ea typeface="Arial" pitchFamily="34" charset="-122"/>
+                <a:cs typeface="Arial" pitchFamily="34" charset="-120"/>
+              </a:rPr>
+              <a:t>Given</a:t>
+            </a:r>
+            <a:endParaRPr lang="en-US" sz="1300" dirty="0"/>
+          </a:p>
+        </p:txBody>
+      </p:sp>
+      <p:sp>
+        <p:nvSpPr>
+          <p:cNvPr id="36" name="Text 31"/>
+          <p:cNvSpPr/>
+          <p:nvPr/>
+        </p:nvSpPr>
+        <p:spPr>
+          <a:xfrm>
+            <a:off x="7162800" y="4267200"/>
+            <a:ext cx="2794000" cy="279400"/>
+          </a:xfrm>
+          <a:prstGeom prst="rect">
+            <a:avLst/>
+          </a:prstGeom>
+          <a:noFill/>
+          <a:ln/>
+        </p:spPr>
+        <p:txBody>
+          <a:bodyPr wrap="square" lIns="0" tIns="0" rIns="0" bIns="0" rtlCol="0" anchor="t"/>
+          <a:lstStyle/>
+          <a:p>
+            <a:pPr algn="l" indent="0" marL="0">
+              <a:lnSpc>
+                <a:spcPts val="1300"/>
+              </a:lnSpc>
+              <a:buNone/>
+            </a:pPr>
+            <a:r>
+              <a:rPr lang="en-US" sz="1300" b="1" i="1" dirty="0">
+                <a:solidFill>
+                  <a:srgbClr val="FF0000"/>
+                </a:solidFill>
+                <a:latin typeface="Arial" pitchFamily="34" charset="0"/>
+                <a:ea typeface="Arial" pitchFamily="34" charset="-122"/>
+                <a:cs typeface="Arial" pitchFamily="34" charset="-120"/>
+              </a:rPr>
+              <a:t>W</a:t>
+            </a:r>
+            <a:pPr algn="l" indent="0" marL="0">
+              <a:lnSpc>
+                <a:spcPts val="1300"/>
+              </a:lnSpc>
+              <a:buNone/>
+            </a:pPr>
+            <a:r>
+              <a:rPr lang="en-US" sz="1300" dirty="0">
+                <a:solidFill>
+                  <a:srgbClr val="333333"/>
+                </a:solidFill>
+                <a:latin typeface="Arial" pitchFamily="34" charset="0"/>
+                <a:ea typeface="Arial" pitchFamily="34" charset="-122"/>
+                <a:cs typeface="Arial" pitchFamily="34" charset="-120"/>
+              </a:rPr>
+              <a:t> is Model Parameter </a:t>
+            </a:r>
+            <a:endParaRPr lang="en-US" sz="1300" dirty="0"/>
+          </a:p>
+        </p:txBody>
+      </p:sp>
+      <p:sp>
+        <p:nvSpPr>
+          <p:cNvPr id="37" name="Shape 32"/>
+          <p:cNvSpPr/>
+          <p:nvPr/>
+        </p:nvSpPr>
+        <p:spPr>
+          <a:xfrm>
+            <a:off x="7175500" y="4419600"/>
+            <a:ext cx="241300" cy="0"/>
+          </a:xfrm>
+          <a:prstGeom prst="line">
+            <a:avLst/>
+          </a:prstGeom>
+          <a:noFill/>
+          <a:ln w="19050">
+            <a:solidFill>
+              <a:srgbClr val="FF0000"/>
+            </a:solidFill>
+            <a:prstDash val="solid"/>
+          </a:ln>
+        </p:spPr>
+      </p:sp>
+      <p:sp>
+        <p:nvSpPr>
+          <p:cNvPr id="38" name="Text 33"/>
+          <p:cNvSpPr/>
+          <p:nvPr/>
+        </p:nvSpPr>
+        <p:spPr>
+          <a:xfrm>
+            <a:off x="9779000" y="4292600"/>
+            <a:ext cx="279400" cy="203200"/>
+          </a:xfrm>
+          <a:prstGeom prst="rect">
+            <a:avLst/>
+          </a:prstGeom>
+          <a:noFill/>
+          <a:ln/>
+        </p:spPr>
+        <p:txBody>
+          <a:bodyPr wrap="square" lIns="0" tIns="0" rIns="0" bIns="0" rtlCol="0" anchor="ctr"/>
+          <a:lstStyle/>
+          <a:p>
+            <a:pPr algn="ctr" indent="0" marL="0">
+              <a:lnSpc>
+                <a:spcPts val="1300"/>
+              </a:lnSpc>
+              <a:buNone/>
+            </a:pPr>
+            <a:r>
+              <a:rPr lang="en-US" sz="1300" b="1" dirty="0">
+                <a:solidFill>
+                  <a:srgbClr val="333333"/>
+                </a:solidFill>
+                <a:latin typeface="Arial" pitchFamily="34" charset="0"/>
+                <a:ea typeface="Arial" pitchFamily="34" charset="-122"/>
+                <a:cs typeface="Arial" pitchFamily="34" charset="-120"/>
+              </a:rPr>
+              <a:t>⇒</a:t>
+            </a:r>
+            <a:endParaRPr lang="en-US" sz="1300" dirty="0"/>
+          </a:p>
+        </p:txBody>
+      </p:sp>
+      <p:sp>
+        <p:nvSpPr>
+          <p:cNvPr id="39" name="Text 34"/>
+          <p:cNvSpPr/>
+          <p:nvPr/>
+        </p:nvSpPr>
+        <p:spPr>
+          <a:xfrm>
+            <a:off x="10147300" y="4267200"/>
+            <a:ext cx="1016000" cy="279400"/>
+          </a:xfrm>
+          <a:prstGeom prst="rect">
+            <a:avLst/>
+          </a:prstGeom>
+          <a:noFill/>
+          <a:ln/>
+        </p:spPr>
+        <p:txBody>
+          <a:bodyPr wrap="square" lIns="0" tIns="0" rIns="0" bIns="0" rtlCol="0" anchor="t"/>
+          <a:lstStyle/>
+          <a:p>
+            <a:pPr algn="l" indent="0" marL="0">
+              <a:lnSpc>
+                <a:spcPts val="1300"/>
+              </a:lnSpc>
+              <a:buNone/>
+            </a:pPr>
+            <a:r>
+              <a:rPr lang="en-US" sz="1300" b="1" dirty="0">
+                <a:solidFill>
+                  <a:srgbClr val="333333"/>
+                </a:solidFill>
+                <a:latin typeface="Arial" pitchFamily="34" charset="0"/>
+                <a:ea typeface="Arial" pitchFamily="34" charset="-122"/>
+                <a:cs typeface="Arial" pitchFamily="34" charset="-120"/>
+              </a:rPr>
+              <a:t>Required</a:t>
+            </a:r>
+            <a:endParaRPr lang="en-US" sz="1300" dirty="0"/>
+          </a:p>
+        </p:txBody>
+      </p:sp>
+      <p:sp>
+        <p:nvSpPr>
+          <p:cNvPr id="40" name="Shape 35"/>
           <p:cNvSpPr/>
           <p:nvPr/>
         </p:nvSpPr>
@@ -1980,7 +2502,7 @@
       </p:sp>
       <p:sp>
         <p:nvSpPr>
-          <p:cNvPr id="30" name="Text 25"/>
+          <p:cNvPr id="41" name="Text 36"/>
           <p:cNvSpPr/>
           <p:nvPr/>
         </p:nvSpPr>
@@ -2141,7 +2663,7 @@
       </p:sp>
       <p:sp>
         <p:nvSpPr>
-          <p:cNvPr id="31" name="Shape 26"/>
+          <p:cNvPr id="42" name="Shape 37"/>
           <p:cNvSpPr/>
           <p:nvPr/>
         </p:nvSpPr>
@@ -2166,7 +2688,7 @@
       </p:sp>
       <p:pic>
         <p:nvPicPr>
-          <p:cNvPr id="32" name="Image 3" descr="/workspaces/codespaces-blank/ai_llm_slides/videos/machine-learning/03_ridger_regression_gradient_descent/recreated_pptx/build/assets/eq_004_formula.png">    </p:cNvPr>
+          <p:cNvPr id="43" name="Image 3" descr="/home/ahmed/Projects/ai_llm_slides/videos/machine-learning/03_ridger_regression_gradient_descent/recreated_pptx/build/assets/eq_004_formula.png">    </p:cNvPr>
           <p:cNvPicPr>
             <a:picLocks noChangeAspect="1"/>
           </p:cNvPicPr>
@@ -2180,8 +2702,8 @@
         </p:blipFill>
         <p:spPr>
           <a:xfrm>
-            <a:off x="2178558" y="6120384"/>
-            <a:ext cx="3366821" cy="307238"/>
+            <a:off x="1181100" y="6004560"/>
+            <a:ext cx="3797320" cy="346466"/>
           </a:xfrm>
           <a:prstGeom prst="rect">
             <a:avLst/>
